--- a/module00-intro/slides.pptx
+++ b/module00-intro/slides.pptx
@@ -717,7 +717,7 @@
           <a:lstStyle/>
           <a:p>
             <a:r>
-              <a:t>Open a terminal. On Windows, prefer WSL. From the learn Unix course folder, run the scaffold script once. It creates a small practice tree under your home directory where checklist exercises can live safely. You will come back to that tree throughout the course.</a:t>
+              <a:t>Open a terminal. On Windows, prefer WSL—Windows Subsystem for Linux—so you get a real Unix shell. From the learn Unix course folder, run the scaffold script once. That script only creates a small practice tree under your home directory where checklist exercises can live safely; it does not install course tools. You will come back to that tree throughout the course.</a:t>
             </a:r>
           </a:p>
         </p:txBody>
@@ -787,7 +787,7 @@
           <a:lstStyle/>
           <a:p>
             <a:r>
-              <a:t>From the monorepo, serve the platform folder with a simple local web server, then open the tools index in your browser. If you prefer, use the published tools site instead. Either way, you only need to confirm you can reach the labs—the next module will send you into a specific one.</a:t>
+              <a:t>From the monorepo, serve the platform folder with a simple local web server, then open the tools index in your browser. Serving the folder means your browser can load the interactive labs as ordinary web pages. If you prefer, use the published tools site instead. Either way, you only need to confirm you can reach the labs—the next module will send you into a specific one.</a:t>
             </a:r>
           </a:p>
         </p:txBody>
@@ -4496,7 +4496,7 @@
                 </a:solidFill>
                 <a:latin typeface="Calibri"/>
               </a:rPr>
-              <a:t>On Windows, prefer WSL</a:t>
+              <a:t>On Windows, prefer WSL, Windows Subsystem for Linux, so you get a real Unix shell</a:t>
             </a:r>
           </a:p>
           <a:p>
@@ -4540,7 +4540,7 @@
                 </a:solidFill>
                 <a:latin typeface="Calibri"/>
               </a:rPr>
-              <a:t>It creates a small practice tree under your home directory where checklist exercises can</a:t>
+              <a:t>It does not install course tools</a:t>
             </a:r>
           </a:p>
           <a:p>
@@ -4704,6 +4704,28 @@
                 <a:latin typeface="Calibri"/>
               </a:rPr>
               <a:t>From the monorepo</a:t>
+            </a:r>
+          </a:p>
+          <a:p>
+            <a:pPr lvl="0" marL="457200" indent="-228600">
+              <a:buFont typeface="Calibri"/>
+              <a:spcAft>
+                <a:spcPts val="1000"/>
+              </a:spcAft>
+              <a:buSzPct val="100000"/>
+              <a:buChar char="•"/>
+              <a:lnSpc>
+                <a:spcPts val="2200"/>
+              </a:lnSpc>
+            </a:pPr>
+            <a:r>
+              <a:rPr sz="2000" b="0">
+                <a:solidFill>
+                  <a:srgbClr val="333333"/>
+                </a:solidFill>
+                <a:latin typeface="Calibri"/>
+              </a:rPr>
+              <a:t>Serving the folder means your browser can load the interactive labs as ordinary web pages</a:t>
             </a:r>
           </a:p>
           <a:p>
